--- a/slides/decks/s05-engraftment-graft-failure.pptx
+++ b/slides/decks/s05-engraftment-graft-failure.pptx
@@ -134,26 +134,26 @@
   <p:extLst>
     <p:ext uri="{521415D9-36F7-43E2-AB2F-B90AF26B5E84}">
       <p14:sectionLst xmlns:p14="http://schemas.microsoft.com/office/powerpoint/2010/main">
-        <p14:section name="Opening" id="{08046f2f-081e-ce21-b86c-b3a959d2c20c}">
+        <p14:section name="Opening" id="{98db4dbb-7176-11ea-ae01-a4976b9fc6bf}">
           <p14:sldIdLst>
             <p14:sldId id="256"/>
             <p14:sldId id="257"/>
           </p14:sldIdLst>
         </p14:section>
-        <p14:section name="Engraftment and chimerism" id="{dabd91f3-2f68-dc94-dd6e-37a70edf7037}">
+        <p14:section name="Engraftment and chimerism" id="{8b7d746b-60bc-34f1-7bd2-d9963eb571c3}">
           <p14:sldIdLst>
             <p14:sldId id="258"/>
             <p14:sldId id="259"/>
           </p14:sldIdLst>
         </p14:section>
-        <p14:section name="Chimerism in disease" id="{bf492a0f-67fe-3a56-90e6-0440680e4508}">
+        <p14:section name="Chimerism in disease" id="{5882580d-bf98-ae35-ffe9-5702de388f98}">
           <p14:sldIdLst>
             <p14:sldId id="260"/>
             <p14:sldId id="261"/>
             <p14:sldId id="262"/>
           </p14:sldIdLst>
         </p14:section>
-        <p14:section name="Graft failure" id="{1ee437de-1d85-b433-646d-0442b2c4b288}">
+        <p14:section name="Graft failure" id="{943535b1-5603-5cdb-2991-f2b80913f820}">
           <p14:sldIdLst>
             <p14:sldId id="263"/>
             <p14:sldId id="264"/>
@@ -163,14 +163,14 @@
             <p14:sldId id="268"/>
           </p14:sldIdLst>
         </p14:section>
-        <p14:section name="Management" id="{b97f84b8-c595-d162-41b6-80ec533b4881}">
+        <p14:section name="Management" id="{d6968e13-2573-8a66-bc77-52d59efafde7}">
           <p14:sldIdLst>
             <p14:sldId id="269"/>
             <p14:sldId id="270"/>
             <p14:sldId id="271"/>
           </p14:sldIdLst>
         </p14:section>
-        <p14:section name="Board questions" id="{b471e7f6-a476-d442-6ec8-232c7a4f8065}">
+        <p14:section name="Board questions" id="{8a5f879a-f917-5eba-4ac1-16d88dd1ed2f}">
           <p14:sldIdLst>
             <p14:sldId id="272"/>
             <p14:sldId id="273"/>
@@ -180,14 +180,14 @@
             <p14:sldId id="277"/>
           </p14:sldIdLst>
         </p14:section>
-        <p14:section name="References" id="{39289a23-c165-1663-4265-87e0142aa384}">
+        <p14:section name="References" id="{0e047a02-66da-6a8a-1dca-d91ffd6dc310}">
           <p14:sldIdLst>
             <p14:sldId id="278"/>
             <p14:sldId id="279"/>
             <p14:sldId id="280"/>
           </p14:sldIdLst>
         </p14:section>
-        <p14:section name="Backup" id="{605bbcb5-81c0-421d-88d6-6fc791611ea0}">
+        <p14:section name="Backup" id="{0b858acd-0507-376c-96ae-dd0c5285886e}">
           <p14:sldIdLst>
             <p14:sldId id="281"/>
             <p14:sldId id="282"/>
@@ -10138,7 +10138,7 @@
                             <a:schemeClr val="tx1"/>
                           </a:solidFill>
                         </a:rPr>
-                        <a:t>Age &lt; 30 years</a:t>
+                        <a:t>Age &lt; 30 years; Karnofsky &lt; 90%</a:t>
                       </a:r>
                       <a:endParaRPr lang="en-US" sz="1600" dirty="0"/>
                     </a:p>
@@ -10178,89 +10178,7 @@
                             <a:schemeClr val="tx1"/>
                           </a:solidFill>
                         </a:rPr>
-                        <a:t>1</a:t>
-                      </a:r>
-                      <a:endParaRPr lang="en-US" sz="1600" dirty="0"/>
-                    </a:p>
-                  </a:txBody>
-                  <a:tcPr marL="25400" marR="101600" marT="63500" marB="63500" anchor="ctr">
-                    <a:lnL w="0" cap="flat" cmpd="sng" algn="ctr">
-                      <a:noFill/>
-                    </a:lnL>
-                    <a:lnR w="0" cap="flat" cmpd="sng" algn="ctr">
-                      <a:noFill/>
-                    </a:lnR>
-                    <a:lnT w="0" cap="flat" cmpd="sng" algn="ctr">
-                      <a:noFill/>
-                    </a:lnT>
-                    <a:lnB w="6350" cap="flat" cmpd="sng" algn="ctr">
-                      <a:solidFill>
-                        <a:srgbClr val="000000"/>
-                      </a:solidFill>
-                      <a:prstDash val="solid"/>
-                      <a:round/>
-                      <a:headEnd type="none" w="med" len="med"/>
-                      <a:tailEnd type="none" w="med" len="med"/>
-                    </a:lnB>
-                  </a:tcPr>
-                </a:tc>
-              </a:tr>
-              <a:tr h="0">
-                <a:tc>
-                  <a:txBody>
-                    <a:bodyPr/>
-                    <a:lstStyle/>
-                    <a:p>
-                      <a:pPr indent="0" marL="0">
-                        <a:buNone/>
-                      </a:pPr>
-                      <a:r>
-                        <a:rPr lang="en-US" sz="1600" dirty="0">
-                          <a:solidFill>
-                            <a:schemeClr val="tx1"/>
-                          </a:solidFill>
-                        </a:rPr>
-                        <a:t>Karnofsky &lt; 90%</a:t>
-                      </a:r>
-                      <a:endParaRPr lang="en-US" sz="1600" dirty="0"/>
-                    </a:p>
-                  </a:txBody>
-                  <a:tcPr marL="25400" marR="101600" marT="63500" marB="63500" anchor="ctr">
-                    <a:lnL w="0" cap="flat" cmpd="sng" algn="ctr">
-                      <a:noFill/>
-                    </a:lnL>
-                    <a:lnR w="0" cap="flat" cmpd="sng" algn="ctr">
-                      <a:noFill/>
-                    </a:lnR>
-                    <a:lnT w="0" cap="flat" cmpd="sng" algn="ctr">
-                      <a:noFill/>
-                    </a:lnT>
-                    <a:lnB w="6350" cap="flat" cmpd="sng" algn="ctr">
-                      <a:solidFill>
-                        <a:srgbClr val="000000"/>
-                      </a:solidFill>
-                      <a:prstDash val="solid"/>
-                      <a:round/>
-                      <a:headEnd type="none" w="med" len="med"/>
-                      <a:tailEnd type="none" w="med" len="med"/>
-                    </a:lnB>
-                  </a:tcPr>
-                </a:tc>
-                <a:tc>
-                  <a:txBody>
-                    <a:bodyPr/>
-                    <a:lstStyle/>
-                    <a:p>
-                      <a:pPr indent="0" marL="0">
-                        <a:buNone/>
-                      </a:pPr>
-                      <a:r>
-                        <a:rPr lang="en-US" sz="1600" dirty="0">
-                          <a:solidFill>
-                            <a:schemeClr val="tx1"/>
-                          </a:solidFill>
-                        </a:rPr>
-                        <a:t>1</a:t>
+                        <a:t>1 each</a:t>
                       </a:r>
                       <a:endParaRPr lang="en-US" sz="1600" dirty="0"/>
                     </a:p>
@@ -10791,7 +10709,7 @@
         </p:nvSpPr>
         <p:spPr>
           <a:xfrm>
-            <a:off x="685800" y="5440680"/>
+            <a:off x="685800" y="5486400"/>
             <a:ext cx="10817352" cy="411480"/>
           </a:xfrm>
           <a:prstGeom prst="rect">
@@ -16078,16 +15996,16 @@
         </p:nvGraphicFramePr>
         <p:xfrm>
           <a:off x="685800" y="2240280"/>
-          <a:ext cx="10817352" cy="914400"/>
+          <a:ext cx="10808208" cy="914400"/>
         </p:xfrm>
         <a:graphic>
           <a:graphicData uri="http://schemas.openxmlformats.org/drawingml/2006/table">
             <a:tbl>
               <a:tblPr/>
               <a:tblGrid>
-                <a:gridCol w="2962656"/>
-                <a:gridCol w="1847088"/>
-                <a:gridCol w="2221992"/>
+                <a:gridCol w="2862072"/>
+                <a:gridCol w="1755648"/>
+                <a:gridCol w="2404872"/>
                 <a:gridCol w="2029968"/>
                 <a:gridCol w="1755648"/>
               </a:tblGrid>
@@ -17266,7 +17184,7 @@
                             <a:schemeClr val="tx1"/>
                           </a:solidFill>
                         </a:rPr>
-                        <a:t>CB 30%; PB-BM 70–75%</a:t>
+                        <a:t>CB 30%; PB/BM 70–75%</a:t>
                       </a:r>
                       <a:endParaRPr lang="en-US" sz="1400" dirty="0"/>
                     </a:p>
@@ -17306,7 +17224,7 @@
                             <a:schemeClr val="tx1"/>
                           </a:solidFill>
                         </a:rPr>
-                        <a:t>1 y: PB 58%, CB 28%</a:t>
+                        <a:t>1 y: PB 58%; CB 28%</a:t>
                       </a:r>
                       <a:endParaRPr lang="en-US" sz="1400" dirty="0"/>
                     </a:p>
@@ -19880,7 +19798,7 @@
         </p:nvSpPr>
         <p:spPr>
           <a:xfrm>
-            <a:off x="685800" y="5486400"/>
+            <a:off x="685800" y="4937760"/>
             <a:ext cx="10817352" cy="411480"/>
           </a:xfrm>
           <a:prstGeom prst="rect">
@@ -20115,9 +20033,9 @@
             <a:tbl>
               <a:tblPr/>
               <a:tblGrid>
-                <a:gridCol w="3986784"/>
-                <a:gridCol w="2752344"/>
-                <a:gridCol w="4078224"/>
+                <a:gridCol w="3703320"/>
+                <a:gridCol w="2468880"/>
+                <a:gridCol w="4645152"/>
               </a:tblGrid>
               <a:tr h="0">
                 <a:tc>
@@ -20881,7 +20799,7 @@
         </p:nvSpPr>
         <p:spPr>
           <a:xfrm>
-            <a:off x="685800" y="4754880"/>
+            <a:off x="685800" y="5074920"/>
             <a:ext cx="10817352" cy="411480"/>
           </a:xfrm>
           <a:prstGeom prst="rect">
@@ -22087,7 +22005,7 @@
                             <a:schemeClr val="tx1"/>
                           </a:solidFill>
                         </a:rPr>
-                        <a:t>Mixed chimerism alone does not warrant DLI</a:t>
+                        <a:t>MC alone does not warrant DLI</a:t>
                       </a:r>
                       <a:endParaRPr lang="en-US" sz="1600" dirty="0"/>
                     </a:p>
@@ -24530,7 +24448,7 @@
         </p:nvSpPr>
         <p:spPr>
           <a:xfrm>
-            <a:off x="685800" y="5486400"/>
+            <a:off x="685800" y="4526280"/>
             <a:ext cx="10817352" cy="411480"/>
           </a:xfrm>
           <a:prstGeom prst="rect">

--- a/slides/decks/s05-engraftment-graft-failure.pptx
+++ b/slides/decks/s05-engraftment-graft-failure.pptx
@@ -134,26 +134,26 @@
   <p:extLst>
     <p:ext uri="{521415D9-36F7-43E2-AB2F-B90AF26B5E84}">
       <p14:sectionLst xmlns:p14="http://schemas.microsoft.com/office/powerpoint/2010/main">
-        <p14:section name="Opening" id="{98db4dbb-7176-11ea-ae01-a4976b9fc6bf}">
+        <p14:section name="Opening" id="{97abadca-0d33-e013-5eb4-f9bdca79fef8}">
           <p14:sldIdLst>
             <p14:sldId id="256"/>
             <p14:sldId id="257"/>
           </p14:sldIdLst>
         </p14:section>
-        <p14:section name="Engraftment and chimerism" id="{8b7d746b-60bc-34f1-7bd2-d9963eb571c3}">
+        <p14:section name="Engraftment and chimerism" id="{3b2edfcb-8d42-b8c1-6fea-4fc2ee5c11ab}">
           <p14:sldIdLst>
             <p14:sldId id="258"/>
             <p14:sldId id="259"/>
           </p14:sldIdLst>
         </p14:section>
-        <p14:section name="Chimerism in disease" id="{5882580d-bf98-ae35-ffe9-5702de388f98}">
+        <p14:section name="Chimerism in disease" id="{c109bf9b-1d72-05d7-1d1e-43ccfcad8045}">
           <p14:sldIdLst>
             <p14:sldId id="260"/>
             <p14:sldId id="261"/>
             <p14:sldId id="262"/>
           </p14:sldIdLst>
         </p14:section>
-        <p14:section name="Graft failure" id="{943535b1-5603-5cdb-2991-f2b80913f820}">
+        <p14:section name="Graft failure" id="{bd4fa771-7d6d-7174-a55d-58781f223595}">
           <p14:sldIdLst>
             <p14:sldId id="263"/>
             <p14:sldId id="264"/>
@@ -163,14 +163,14 @@
             <p14:sldId id="268"/>
           </p14:sldIdLst>
         </p14:section>
-        <p14:section name="Management" id="{d6968e13-2573-8a66-bc77-52d59efafde7}">
+        <p14:section name="Management" id="{d3ca125d-9601-840a-5d15-f831401ad551}">
           <p14:sldIdLst>
             <p14:sldId id="269"/>
             <p14:sldId id="270"/>
             <p14:sldId id="271"/>
           </p14:sldIdLst>
         </p14:section>
-        <p14:section name="Board questions" id="{8a5f879a-f917-5eba-4ac1-16d88dd1ed2f}">
+        <p14:section name="Board questions" id="{dc188439-8adb-3f38-6707-4fc392421af2}">
           <p14:sldIdLst>
             <p14:sldId id="272"/>
             <p14:sldId id="273"/>
@@ -180,14 +180,14 @@
             <p14:sldId id="277"/>
           </p14:sldIdLst>
         </p14:section>
-        <p14:section name="References" id="{0e047a02-66da-6a8a-1dca-d91ffd6dc310}">
+        <p14:section name="References" id="{aab83916-5588-b215-6bdc-48ed5335cba6}">
           <p14:sldIdLst>
             <p14:sldId id="278"/>
             <p14:sldId id="279"/>
             <p14:sldId id="280"/>
           </p14:sldIdLst>
         </p14:section>
-        <p14:section name="Backup" id="{0b858acd-0507-376c-96ae-dd0c5285886e}">
+        <p14:section name="Backup" id="{001688a4-ed19-9ca1-72ee-9ffe82f337e9}">
           <p14:sldIdLst>
             <p14:sldId id="281"/>
             <p14:sldId id="282"/>
@@ -17184,10 +17184,24 @@
                             <a:schemeClr val="tx1"/>
                           </a:solidFill>
                         </a:rPr>
-                        <a:t>CB 30%; PB/BM 70–75%</a:t>
+                        <a:t>CB 30%</a:t>
                       </a:r>
                       <a:endParaRPr lang="en-US" sz="1400" dirty="0"/>
                     </a:p>
+                    <a:p>
+                      <a:pPr indent="0" marL="0">
+                        <a:buNone/>
+                      </a:pPr>
+                      <a:r>
+                        <a:rPr lang="en-US" sz="1400" dirty="0">
+                          <a:solidFill>
+                            <a:schemeClr val="tx1"/>
+                          </a:solidFill>
+                        </a:rPr>
+                        <a:t>PB/BM 70–75%</a:t>
+                      </a:r>
+                      <a:endParaRPr lang="en-US" sz="1400" dirty="0"/>
+                    </a:p>
                   </a:txBody>
                   <a:tcPr marL="25400" marR="101600" marT="63500" marB="63500" anchor="ctr">
                     <a:lnL w="0" cap="flat" cmpd="sng" algn="ctr">
@@ -17224,7 +17238,21 @@
                             <a:schemeClr val="tx1"/>
                           </a:solidFill>
                         </a:rPr>
-                        <a:t>1 y: PB 58%; CB 28%</a:t>
+                        <a:t>1 y: PB 58%</a:t>
+                      </a:r>
+                      <a:endParaRPr lang="en-US" sz="1400" dirty="0"/>
+                    </a:p>
+                    <a:p>
+                      <a:pPr indent="0" marL="0">
+                        <a:buNone/>
+                      </a:pPr>
+                      <a:r>
+                        <a:rPr lang="en-US" sz="1400" dirty="0">
+                          <a:solidFill>
+                            <a:schemeClr val="tx1"/>
+                          </a:solidFill>
+                        </a:rPr>
+                        <a:t>1 y: CB 28%</a:t>
                       </a:r>
                       <a:endParaRPr lang="en-US" sz="1400" dirty="0"/>
                     </a:p>

--- a/slides/decks/s05-engraftment-graft-failure.pptx
+++ b/slides/decks/s05-engraftment-graft-failure.pptx
@@ -134,26 +134,26 @@
   <p:extLst>
     <p:ext uri="{521415D9-36F7-43E2-AB2F-B90AF26B5E84}">
       <p14:sectionLst xmlns:p14="http://schemas.microsoft.com/office/powerpoint/2010/main">
-        <p14:section name="Opening" id="{97abadca-0d33-e013-5eb4-f9bdca79fef8}">
+        <p14:section name="Opening" id="{7202fd22-a960-04ce-18c0-6da13e1e7ce2}">
           <p14:sldIdLst>
             <p14:sldId id="256"/>
             <p14:sldId id="257"/>
           </p14:sldIdLst>
         </p14:section>
-        <p14:section name="Engraftment and chimerism" id="{3b2edfcb-8d42-b8c1-6fea-4fc2ee5c11ab}">
+        <p14:section name="Engraftment and chimerism" id="{55778a8d-5cd5-17b5-343f-994852ee7589}">
           <p14:sldIdLst>
             <p14:sldId id="258"/>
             <p14:sldId id="259"/>
           </p14:sldIdLst>
         </p14:section>
-        <p14:section name="Chimerism in disease" id="{c109bf9b-1d72-05d7-1d1e-43ccfcad8045}">
+        <p14:section name="Chimerism in disease" id="{e485424f-e55d-d7b3-a5a3-97d9b9bb6a33}">
           <p14:sldIdLst>
             <p14:sldId id="260"/>
             <p14:sldId id="261"/>
             <p14:sldId id="262"/>
           </p14:sldIdLst>
         </p14:section>
-        <p14:section name="Graft failure" id="{bd4fa771-7d6d-7174-a55d-58781f223595}">
+        <p14:section name="Graft failure" id="{d2ffb834-90eb-61ac-c62c-e3f8cd43791e}">
           <p14:sldIdLst>
             <p14:sldId id="263"/>
             <p14:sldId id="264"/>
@@ -163,14 +163,14 @@
             <p14:sldId id="268"/>
           </p14:sldIdLst>
         </p14:section>
-        <p14:section name="Management" id="{d3ca125d-9601-840a-5d15-f831401ad551}">
+        <p14:section name="Management" id="{b5e5f779-ea12-b04b-5d46-54e4b30456a7}">
           <p14:sldIdLst>
             <p14:sldId id="269"/>
             <p14:sldId id="270"/>
             <p14:sldId id="271"/>
           </p14:sldIdLst>
         </p14:section>
-        <p14:section name="Board questions" id="{dc188439-8adb-3f38-6707-4fc392421af2}">
+        <p14:section name="Board questions" id="{237b8dfa-fd93-d54c-0c72-44b0091463d9}">
           <p14:sldIdLst>
             <p14:sldId id="272"/>
             <p14:sldId id="273"/>
@@ -180,14 +180,14 @@
             <p14:sldId id="277"/>
           </p14:sldIdLst>
         </p14:section>
-        <p14:section name="References" id="{aab83916-5588-b215-6bdc-48ed5335cba6}">
+        <p14:section name="References" id="{3c68714e-8a45-4790-894b-7283000e16c4}">
           <p14:sldIdLst>
             <p14:sldId id="278"/>
             <p14:sldId id="279"/>
             <p14:sldId id="280"/>
           </p14:sldIdLst>
         </p14:section>
-        <p14:section name="Backup" id="{001688a4-ed19-9ca1-72ee-9ffe82f337e9}">
+        <p14:section name="Backup" id="{74009f36-7aa7-6d33-2ecd-b6f074bd2cad}">
           <p14:sldIdLst>
             <p14:sldId id="281"/>
             <p14:sldId id="282"/>
